--- a/Root Guard (STP Toolkit)  CCNA 200-301 Day 21 (part 3)/ccna-notes.pptx
+++ b/Root Guard (STP Toolkit)  CCNA 200-301 Day 21 (part 3)/ccna-notes.pptx
@@ -118,7 +118,146 @@
       </a:defRPr>
     </a:lvl9pPr>
   </p:defaultTextStyle>
+  <p:extLst>
+    <p:ext uri="{EFAFB233-063F-42B5-8137-9DF3F51BA10A}">
+      <p15:sldGuideLst xmlns:p15="http://schemas.microsoft.com/office/powerpoint/2012/main"/>
+    </p:ext>
+  </p:extLst>
 </p:presentation>
+</file>
+
+<file path=ppt/changesInfos/changesInfo1.xml><?xml version="1.0" encoding="utf-8"?>
+<pc:chgInfo xmlns:a="http://schemas.openxmlformats.org/drawingml/2006/main" xmlns:r="http://schemas.openxmlformats.org/officeDocument/2006/relationships" xmlns:ac="http://schemas.microsoft.com/office/drawing/2013/main/command" xmlns:pc="http://schemas.microsoft.com/office/powerpoint/2013/main/command">
+  <pc:docChgLst>
+    <pc:chgData name="joe mcgee" userId="18b4105e8c848f48" providerId="LiveId" clId="{F4CB7604-12E2-4C2C-A72E-4EEEDFE6408B}"/>
+    <pc:docChg chg="modSld">
+      <pc:chgData name="joe mcgee" userId="18b4105e8c848f48" providerId="LiveId" clId="{F4CB7604-12E2-4C2C-A72E-4EEEDFE6408B}" dt="2025-11-28T13:03:16.254" v="7" actId="22"/>
+      <pc:docMkLst>
+        <pc:docMk/>
+      </pc:docMkLst>
+      <pc:sldChg chg="addSp mod">
+        <pc:chgData name="joe mcgee" userId="18b4105e8c848f48" providerId="LiveId" clId="{F4CB7604-12E2-4C2C-A72E-4EEEDFE6408B}" dt="2025-11-28T13:00:19.987" v="0" actId="22"/>
+        <pc:sldMkLst>
+          <pc:docMk/>
+          <pc:sldMk cId="3607211251" sldId="257"/>
+        </pc:sldMkLst>
+        <pc:picChg chg="add">
+          <ac:chgData name="joe mcgee" userId="18b4105e8c848f48" providerId="LiveId" clId="{F4CB7604-12E2-4C2C-A72E-4EEEDFE6408B}" dt="2025-11-28T13:00:19.987" v="0" actId="22"/>
+          <ac:picMkLst>
+            <pc:docMk/>
+            <pc:sldMk cId="3607211251" sldId="257"/>
+            <ac:picMk id="3" creationId="{FD421150-1107-432B-2039-D5202E8040B8}"/>
+          </ac:picMkLst>
+        </pc:picChg>
+      </pc:sldChg>
+      <pc:sldChg chg="addSp mod">
+        <pc:chgData name="joe mcgee" userId="18b4105e8c848f48" providerId="LiveId" clId="{F4CB7604-12E2-4C2C-A72E-4EEEDFE6408B}" dt="2025-11-28T13:00:57.734" v="1" actId="22"/>
+        <pc:sldMkLst>
+          <pc:docMk/>
+          <pc:sldMk cId="1556585913" sldId="258"/>
+        </pc:sldMkLst>
+        <pc:picChg chg="add">
+          <ac:chgData name="joe mcgee" userId="18b4105e8c848f48" providerId="LiveId" clId="{F4CB7604-12E2-4C2C-A72E-4EEEDFE6408B}" dt="2025-11-28T13:00:57.734" v="1" actId="22"/>
+          <ac:picMkLst>
+            <pc:docMk/>
+            <pc:sldMk cId="1556585913" sldId="258"/>
+            <ac:picMk id="3" creationId="{9B583CEA-E1AB-70F3-8402-9A0582885F18}"/>
+          </ac:picMkLst>
+        </pc:picChg>
+      </pc:sldChg>
+      <pc:sldChg chg="addSp mod">
+        <pc:chgData name="joe mcgee" userId="18b4105e8c848f48" providerId="LiveId" clId="{F4CB7604-12E2-4C2C-A72E-4EEEDFE6408B}" dt="2025-11-28T13:01:22.920" v="2" actId="22"/>
+        <pc:sldMkLst>
+          <pc:docMk/>
+          <pc:sldMk cId="2413081918" sldId="259"/>
+        </pc:sldMkLst>
+        <pc:picChg chg="add">
+          <ac:chgData name="joe mcgee" userId="18b4105e8c848f48" providerId="LiveId" clId="{F4CB7604-12E2-4C2C-A72E-4EEEDFE6408B}" dt="2025-11-28T13:01:22.920" v="2" actId="22"/>
+          <ac:picMkLst>
+            <pc:docMk/>
+            <pc:sldMk cId="2413081918" sldId="259"/>
+            <ac:picMk id="3" creationId="{12AE3A38-041C-CA79-C363-055685FBBFD8}"/>
+          </ac:picMkLst>
+        </pc:picChg>
+      </pc:sldChg>
+      <pc:sldChg chg="addSp mod">
+        <pc:chgData name="joe mcgee" userId="18b4105e8c848f48" providerId="LiveId" clId="{F4CB7604-12E2-4C2C-A72E-4EEEDFE6408B}" dt="2025-11-28T13:01:35.816" v="3" actId="22"/>
+        <pc:sldMkLst>
+          <pc:docMk/>
+          <pc:sldMk cId="26323489" sldId="260"/>
+        </pc:sldMkLst>
+        <pc:picChg chg="add">
+          <ac:chgData name="joe mcgee" userId="18b4105e8c848f48" providerId="LiveId" clId="{F4CB7604-12E2-4C2C-A72E-4EEEDFE6408B}" dt="2025-11-28T13:01:35.816" v="3" actId="22"/>
+          <ac:picMkLst>
+            <pc:docMk/>
+            <pc:sldMk cId="26323489" sldId="260"/>
+            <ac:picMk id="3" creationId="{8C98724D-12FB-8455-7992-5C14E35B414C}"/>
+          </ac:picMkLst>
+        </pc:picChg>
+      </pc:sldChg>
+      <pc:sldChg chg="addSp mod">
+        <pc:chgData name="joe mcgee" userId="18b4105e8c848f48" providerId="LiveId" clId="{F4CB7604-12E2-4C2C-A72E-4EEEDFE6408B}" dt="2025-11-28T13:02:07.821" v="4" actId="22"/>
+        <pc:sldMkLst>
+          <pc:docMk/>
+          <pc:sldMk cId="3725328719" sldId="261"/>
+        </pc:sldMkLst>
+        <pc:picChg chg="add">
+          <ac:chgData name="joe mcgee" userId="18b4105e8c848f48" providerId="LiveId" clId="{F4CB7604-12E2-4C2C-A72E-4EEEDFE6408B}" dt="2025-11-28T13:02:07.821" v="4" actId="22"/>
+          <ac:picMkLst>
+            <pc:docMk/>
+            <pc:sldMk cId="3725328719" sldId="261"/>
+            <ac:picMk id="3" creationId="{3FD9E5E9-CEA6-B825-2A92-669AAF18164A}"/>
+          </ac:picMkLst>
+        </pc:picChg>
+      </pc:sldChg>
+      <pc:sldChg chg="addSp mod">
+        <pc:chgData name="joe mcgee" userId="18b4105e8c848f48" providerId="LiveId" clId="{F4CB7604-12E2-4C2C-A72E-4EEEDFE6408B}" dt="2025-11-28T13:02:27.749" v="5" actId="22"/>
+        <pc:sldMkLst>
+          <pc:docMk/>
+          <pc:sldMk cId="278332871" sldId="262"/>
+        </pc:sldMkLst>
+        <pc:picChg chg="add">
+          <ac:chgData name="joe mcgee" userId="18b4105e8c848f48" providerId="LiveId" clId="{F4CB7604-12E2-4C2C-A72E-4EEEDFE6408B}" dt="2025-11-28T13:02:27.749" v="5" actId="22"/>
+          <ac:picMkLst>
+            <pc:docMk/>
+            <pc:sldMk cId="278332871" sldId="262"/>
+            <ac:picMk id="3" creationId="{C9A97C60-C3D7-872C-A3E7-B4096DE086DD}"/>
+          </ac:picMkLst>
+        </pc:picChg>
+      </pc:sldChg>
+      <pc:sldChg chg="addSp mod">
+        <pc:chgData name="joe mcgee" userId="18b4105e8c848f48" providerId="LiveId" clId="{F4CB7604-12E2-4C2C-A72E-4EEEDFE6408B}" dt="2025-11-28T13:02:52.395" v="6" actId="22"/>
+        <pc:sldMkLst>
+          <pc:docMk/>
+          <pc:sldMk cId="239336338" sldId="263"/>
+        </pc:sldMkLst>
+        <pc:picChg chg="add">
+          <ac:chgData name="joe mcgee" userId="18b4105e8c848f48" providerId="LiveId" clId="{F4CB7604-12E2-4C2C-A72E-4EEEDFE6408B}" dt="2025-11-28T13:02:52.395" v="6" actId="22"/>
+          <ac:picMkLst>
+            <pc:docMk/>
+            <pc:sldMk cId="239336338" sldId="263"/>
+            <ac:picMk id="3" creationId="{77E8CEC7-F1AE-8A00-777C-575CF10B53FC}"/>
+          </ac:picMkLst>
+        </pc:picChg>
+      </pc:sldChg>
+      <pc:sldChg chg="addSp mod">
+        <pc:chgData name="joe mcgee" userId="18b4105e8c848f48" providerId="LiveId" clId="{F4CB7604-12E2-4C2C-A72E-4EEEDFE6408B}" dt="2025-11-28T13:03:16.254" v="7" actId="22"/>
+        <pc:sldMkLst>
+          <pc:docMk/>
+          <pc:sldMk cId="3538230265" sldId="264"/>
+        </pc:sldMkLst>
+        <pc:picChg chg="add">
+          <ac:chgData name="joe mcgee" userId="18b4105e8c848f48" providerId="LiveId" clId="{F4CB7604-12E2-4C2C-A72E-4EEEDFE6408B}" dt="2025-11-28T13:03:16.254" v="7" actId="22"/>
+          <ac:picMkLst>
+            <pc:docMk/>
+            <pc:sldMk cId="3538230265" sldId="264"/>
+            <ac:picMk id="3" creationId="{422B93BA-0E52-5B4C-6EE3-76C839AB3F71}"/>
+          </ac:picMkLst>
+        </pc:picChg>
+      </pc:sldChg>
+    </pc:docChg>
+  </pc:docChgLst>
+</pc:chgInfo>
 </file>
 
 <file path=ppt/slideLayouts/slideLayout1.xml><?xml version="1.0" encoding="utf-8"?>
@@ -268,7 +407,7 @@
           <a:p>
             <a:fld id="{21427A05-EB5E-4A06-AF7C-B563B8150BE0}" type="datetimeFigureOut">
               <a:rPr lang="en-US" smtClean="0"/>
-              <a:t>11/27/2025</a:t>
+              <a:t>11/28/2025</a:t>
             </a:fld>
             <a:endParaRPr lang="en-US"/>
           </a:p>
@@ -466,7 +605,7 @@
           <a:p>
             <a:fld id="{21427A05-EB5E-4A06-AF7C-B563B8150BE0}" type="datetimeFigureOut">
               <a:rPr lang="en-US" smtClean="0"/>
-              <a:t>11/27/2025</a:t>
+              <a:t>11/28/2025</a:t>
             </a:fld>
             <a:endParaRPr lang="en-US"/>
           </a:p>
@@ -674,7 +813,7 @@
           <a:p>
             <a:fld id="{21427A05-EB5E-4A06-AF7C-B563B8150BE0}" type="datetimeFigureOut">
               <a:rPr lang="en-US" smtClean="0"/>
-              <a:t>11/27/2025</a:t>
+              <a:t>11/28/2025</a:t>
             </a:fld>
             <a:endParaRPr lang="en-US"/>
           </a:p>
@@ -872,7 +1011,7 @@
           <a:p>
             <a:fld id="{21427A05-EB5E-4A06-AF7C-B563B8150BE0}" type="datetimeFigureOut">
               <a:rPr lang="en-US" smtClean="0"/>
-              <a:t>11/27/2025</a:t>
+              <a:t>11/28/2025</a:t>
             </a:fld>
             <a:endParaRPr lang="en-US"/>
           </a:p>
@@ -1147,7 +1286,7 @@
           <a:p>
             <a:fld id="{21427A05-EB5E-4A06-AF7C-B563B8150BE0}" type="datetimeFigureOut">
               <a:rPr lang="en-US" smtClean="0"/>
-              <a:t>11/27/2025</a:t>
+              <a:t>11/28/2025</a:t>
             </a:fld>
             <a:endParaRPr lang="en-US"/>
           </a:p>
@@ -1412,7 +1551,7 @@
           <a:p>
             <a:fld id="{21427A05-EB5E-4A06-AF7C-B563B8150BE0}" type="datetimeFigureOut">
               <a:rPr lang="en-US" smtClean="0"/>
-              <a:t>11/27/2025</a:t>
+              <a:t>11/28/2025</a:t>
             </a:fld>
             <a:endParaRPr lang="en-US"/>
           </a:p>
@@ -1824,7 +1963,7 @@
           <a:p>
             <a:fld id="{21427A05-EB5E-4A06-AF7C-B563B8150BE0}" type="datetimeFigureOut">
               <a:rPr lang="en-US" smtClean="0"/>
-              <a:t>11/27/2025</a:t>
+              <a:t>11/28/2025</a:t>
             </a:fld>
             <a:endParaRPr lang="en-US"/>
           </a:p>
@@ -1965,7 +2104,7 @@
           <a:p>
             <a:fld id="{21427A05-EB5E-4A06-AF7C-B563B8150BE0}" type="datetimeFigureOut">
               <a:rPr lang="en-US" smtClean="0"/>
-              <a:t>11/27/2025</a:t>
+              <a:t>11/28/2025</a:t>
             </a:fld>
             <a:endParaRPr lang="en-US"/>
           </a:p>
@@ -2078,7 +2217,7 @@
           <a:p>
             <a:fld id="{21427A05-EB5E-4A06-AF7C-B563B8150BE0}" type="datetimeFigureOut">
               <a:rPr lang="en-US" smtClean="0"/>
-              <a:t>11/27/2025</a:t>
+              <a:t>11/28/2025</a:t>
             </a:fld>
             <a:endParaRPr lang="en-US"/>
           </a:p>
@@ -2389,7 +2528,7 @@
           <a:p>
             <a:fld id="{21427A05-EB5E-4A06-AF7C-B563B8150BE0}" type="datetimeFigureOut">
               <a:rPr lang="en-US" smtClean="0"/>
-              <a:t>11/27/2025</a:t>
+              <a:t>11/28/2025</a:t>
             </a:fld>
             <a:endParaRPr lang="en-US"/>
           </a:p>
@@ -2677,7 +2816,7 @@
           <a:p>
             <a:fld id="{21427A05-EB5E-4A06-AF7C-B563B8150BE0}" type="datetimeFigureOut">
               <a:rPr lang="en-US" smtClean="0"/>
-              <a:t>11/27/2025</a:t>
+              <a:t>11/28/2025</a:t>
             </a:fld>
             <a:endParaRPr lang="en-US"/>
           </a:p>
@@ -2918,7 +3057,7 @@
           <a:p>
             <a:fld id="{21427A05-EB5E-4A06-AF7C-B563B8150BE0}" type="datetimeFigureOut">
               <a:rPr lang="en-US" smtClean="0"/>
-              <a:t>11/27/2025</a:t>
+              <a:t>11/28/2025</a:t>
             </a:fld>
             <a:endParaRPr lang="en-US"/>
           </a:p>
@@ -3617,6 +3756,36 @@
           <a:chExt cx="0" cy="0"/>
         </a:xfrm>
       </p:grpSpPr>
+      <p:pic>
+        <p:nvPicPr>
+          <p:cNvPr id="3" name="Picture 2">
+            <a:extLst>
+              <a:ext uri="{FF2B5EF4-FFF2-40B4-BE49-F238E27FC236}">
+                <a16:creationId xmlns:a16="http://schemas.microsoft.com/office/drawing/2014/main" id="{FD421150-1107-432B-2039-D5202E8040B8}"/>
+              </a:ext>
+            </a:extLst>
+          </p:cNvPr>
+          <p:cNvPicPr>
+            <a:picLocks noChangeAspect="1"/>
+          </p:cNvPicPr>
+          <p:nvPr/>
+        </p:nvPicPr>
+        <p:blipFill>
+          <a:blip r:embed="rId2"/>
+          <a:stretch>
+            <a:fillRect/>
+          </a:stretch>
+        </p:blipFill>
+        <p:spPr>
+          <a:xfrm>
+            <a:off x="125212" y="75909"/>
+            <a:ext cx="11941575" cy="6706181"/>
+          </a:xfrm>
+          <a:prstGeom prst="rect">
+            <a:avLst/>
+          </a:prstGeom>
+        </p:spPr>
+      </p:pic>
     </p:spTree>
     <p:extLst>
       <p:ext uri="{BB962C8B-B14F-4D97-AF65-F5344CB8AC3E}">
@@ -3653,6 +3822,36 @@
           <a:chExt cx="0" cy="0"/>
         </a:xfrm>
       </p:grpSpPr>
+      <p:pic>
+        <p:nvPicPr>
+          <p:cNvPr id="3" name="Picture 2">
+            <a:extLst>
+              <a:ext uri="{FF2B5EF4-FFF2-40B4-BE49-F238E27FC236}">
+                <a16:creationId xmlns:a16="http://schemas.microsoft.com/office/drawing/2014/main" id="{9B583CEA-E1AB-70F3-8402-9A0582885F18}"/>
+              </a:ext>
+            </a:extLst>
+          </p:cNvPr>
+          <p:cNvPicPr>
+            <a:picLocks noChangeAspect="1"/>
+          </p:cNvPicPr>
+          <p:nvPr/>
+        </p:nvPicPr>
+        <p:blipFill>
+          <a:blip r:embed="rId2"/>
+          <a:stretch>
+            <a:fillRect/>
+          </a:stretch>
+        </p:blipFill>
+        <p:spPr>
+          <a:xfrm>
+            <a:off x="178557" y="102581"/>
+            <a:ext cx="11834886" cy="6652837"/>
+          </a:xfrm>
+          <a:prstGeom prst="rect">
+            <a:avLst/>
+          </a:prstGeom>
+        </p:spPr>
+      </p:pic>
     </p:spTree>
     <p:extLst>
       <p:ext uri="{BB962C8B-B14F-4D97-AF65-F5344CB8AC3E}">
@@ -3689,6 +3888,36 @@
           <a:chExt cx="0" cy="0"/>
         </a:xfrm>
       </p:grpSpPr>
+      <p:pic>
+        <p:nvPicPr>
+          <p:cNvPr id="3" name="Picture 2">
+            <a:extLst>
+              <a:ext uri="{FF2B5EF4-FFF2-40B4-BE49-F238E27FC236}">
+                <a16:creationId xmlns:a16="http://schemas.microsoft.com/office/drawing/2014/main" id="{12AE3A38-041C-CA79-C363-055685FBBFD8}"/>
+              </a:ext>
+            </a:extLst>
+          </p:cNvPr>
+          <p:cNvPicPr>
+            <a:picLocks noChangeAspect="1"/>
+          </p:cNvPicPr>
+          <p:nvPr/>
+        </p:nvPicPr>
+        <p:blipFill>
+          <a:blip r:embed="rId2"/>
+          <a:stretch>
+            <a:fillRect/>
+          </a:stretch>
+        </p:blipFill>
+        <p:spPr>
+          <a:xfrm>
+            <a:off x="178557" y="125443"/>
+            <a:ext cx="11834886" cy="6607113"/>
+          </a:xfrm>
+          <a:prstGeom prst="rect">
+            <a:avLst/>
+          </a:prstGeom>
+        </p:spPr>
+      </p:pic>
     </p:spTree>
     <p:extLst>
       <p:ext uri="{BB962C8B-B14F-4D97-AF65-F5344CB8AC3E}">
@@ -3725,6 +3954,36 @@
           <a:chExt cx="0" cy="0"/>
         </a:xfrm>
       </p:grpSpPr>
+      <p:pic>
+        <p:nvPicPr>
+          <p:cNvPr id="3" name="Picture 2">
+            <a:extLst>
+              <a:ext uri="{FF2B5EF4-FFF2-40B4-BE49-F238E27FC236}">
+                <a16:creationId xmlns:a16="http://schemas.microsoft.com/office/drawing/2014/main" id="{8C98724D-12FB-8455-7992-5C14E35B414C}"/>
+              </a:ext>
+            </a:extLst>
+          </p:cNvPr>
+          <p:cNvPicPr>
+            <a:picLocks noChangeAspect="1"/>
+          </p:cNvPicPr>
+          <p:nvPr/>
+        </p:nvPicPr>
+        <p:blipFill>
+          <a:blip r:embed="rId2"/>
+          <a:stretch>
+            <a:fillRect/>
+          </a:stretch>
+        </p:blipFill>
+        <p:spPr>
+          <a:xfrm>
+            <a:off x="209040" y="72099"/>
+            <a:ext cx="11773920" cy="6713802"/>
+          </a:xfrm>
+          <a:prstGeom prst="rect">
+            <a:avLst/>
+          </a:prstGeom>
+        </p:spPr>
+      </p:pic>
     </p:spTree>
     <p:extLst>
       <p:ext uri="{BB962C8B-B14F-4D97-AF65-F5344CB8AC3E}">
@@ -3761,6 +4020,36 @@
           <a:chExt cx="0" cy="0"/>
         </a:xfrm>
       </p:grpSpPr>
+      <p:pic>
+        <p:nvPicPr>
+          <p:cNvPr id="3" name="Picture 2">
+            <a:extLst>
+              <a:ext uri="{FF2B5EF4-FFF2-40B4-BE49-F238E27FC236}">
+                <a16:creationId xmlns:a16="http://schemas.microsoft.com/office/drawing/2014/main" id="{3FD9E5E9-CEA6-B825-2A92-669AAF18164A}"/>
+              </a:ext>
+            </a:extLst>
+          </p:cNvPr>
+          <p:cNvPicPr>
+            <a:picLocks noChangeAspect="1"/>
+          </p:cNvPicPr>
+          <p:nvPr/>
+        </p:nvPicPr>
+        <p:blipFill>
+          <a:blip r:embed="rId2"/>
+          <a:stretch>
+            <a:fillRect/>
+          </a:stretch>
+        </p:blipFill>
+        <p:spPr>
+          <a:xfrm>
+            <a:off x="178557" y="94961"/>
+            <a:ext cx="11834886" cy="6668078"/>
+          </a:xfrm>
+          <a:prstGeom prst="rect">
+            <a:avLst/>
+          </a:prstGeom>
+        </p:spPr>
+      </p:pic>
     </p:spTree>
     <p:extLst>
       <p:ext uri="{BB962C8B-B14F-4D97-AF65-F5344CB8AC3E}">
@@ -3797,6 +4086,36 @@
           <a:chExt cx="0" cy="0"/>
         </a:xfrm>
       </p:grpSpPr>
+      <p:pic>
+        <p:nvPicPr>
+          <p:cNvPr id="3" name="Picture 2">
+            <a:extLst>
+              <a:ext uri="{FF2B5EF4-FFF2-40B4-BE49-F238E27FC236}">
+                <a16:creationId xmlns:a16="http://schemas.microsoft.com/office/drawing/2014/main" id="{C9A97C60-C3D7-872C-A3E7-B4096DE086DD}"/>
+              </a:ext>
+            </a:extLst>
+          </p:cNvPr>
+          <p:cNvPicPr>
+            <a:picLocks noChangeAspect="1"/>
+          </p:cNvPicPr>
+          <p:nvPr/>
+        </p:nvPicPr>
+        <p:blipFill>
+          <a:blip r:embed="rId2"/>
+          <a:stretch>
+            <a:fillRect/>
+          </a:stretch>
+        </p:blipFill>
+        <p:spPr>
+          <a:xfrm>
+            <a:off x="201419" y="148305"/>
+            <a:ext cx="11789162" cy="6561389"/>
+          </a:xfrm>
+          <a:prstGeom prst="rect">
+            <a:avLst/>
+          </a:prstGeom>
+        </p:spPr>
+      </p:pic>
     </p:spTree>
     <p:extLst>
       <p:ext uri="{BB962C8B-B14F-4D97-AF65-F5344CB8AC3E}">
@@ -3833,6 +4152,36 @@
           <a:chExt cx="0" cy="0"/>
         </a:xfrm>
       </p:grpSpPr>
+      <p:pic>
+        <p:nvPicPr>
+          <p:cNvPr id="3" name="Picture 2">
+            <a:extLst>
+              <a:ext uri="{FF2B5EF4-FFF2-40B4-BE49-F238E27FC236}">
+                <a16:creationId xmlns:a16="http://schemas.microsoft.com/office/drawing/2014/main" id="{77E8CEC7-F1AE-8A00-777C-575CF10B53FC}"/>
+              </a:ext>
+            </a:extLst>
+          </p:cNvPr>
+          <p:cNvPicPr>
+            <a:picLocks noChangeAspect="1"/>
+          </p:cNvPicPr>
+          <p:nvPr/>
+        </p:nvPicPr>
+        <p:blipFill>
+          <a:blip r:embed="rId2"/>
+          <a:stretch>
+            <a:fillRect/>
+          </a:stretch>
+        </p:blipFill>
+        <p:spPr>
+          <a:xfrm>
+            <a:off x="167126" y="106392"/>
+            <a:ext cx="11857748" cy="6645216"/>
+          </a:xfrm>
+          <a:prstGeom prst="rect">
+            <a:avLst/>
+          </a:prstGeom>
+        </p:spPr>
+      </p:pic>
     </p:spTree>
     <p:extLst>
       <p:ext uri="{BB962C8B-B14F-4D97-AF65-F5344CB8AC3E}">
@@ -3869,6 +4218,36 @@
           <a:chExt cx="0" cy="0"/>
         </a:xfrm>
       </p:grpSpPr>
+      <p:pic>
+        <p:nvPicPr>
+          <p:cNvPr id="3" name="Picture 2">
+            <a:extLst>
+              <a:ext uri="{FF2B5EF4-FFF2-40B4-BE49-F238E27FC236}">
+                <a16:creationId xmlns:a16="http://schemas.microsoft.com/office/drawing/2014/main" id="{422B93BA-0E52-5B4C-6EE3-76C839AB3F71}"/>
+              </a:ext>
+            </a:extLst>
+          </p:cNvPr>
+          <p:cNvPicPr>
+            <a:picLocks noChangeAspect="1"/>
+          </p:cNvPicPr>
+          <p:nvPr/>
+        </p:nvPicPr>
+        <p:blipFill>
+          <a:blip r:embed="rId2"/>
+          <a:stretch>
+            <a:fillRect/>
+          </a:stretch>
+        </p:blipFill>
+        <p:spPr>
+          <a:xfrm>
+            <a:off x="205229" y="102581"/>
+            <a:ext cx="11781541" cy="6652837"/>
+          </a:xfrm>
+          <a:prstGeom prst="rect">
+            <a:avLst/>
+          </a:prstGeom>
+        </p:spPr>
+      </p:pic>
     </p:spTree>
     <p:extLst>
       <p:ext uri="{BB962C8B-B14F-4D97-AF65-F5344CB8AC3E}">
